--- a/media/Triadic_Cognition_P2P_Video_Slides_Reviewer_Update.pptx
+++ b/media/Triadic_Cognition_P2P_Video_Slides_Reviewer_Update.pptx
@@ -2,26 +2,26 @@
 <file path=ppt/presentation.xml><?xml version="1.0" encoding="utf-8"?>
 <p:presentation xmlns:p="http://schemas.openxmlformats.org/presentationml/2006/main">
   <p:sldMasterIdLst>
-    <p:sldMasterId xmlns:r="http://schemas.openxmlformats.org/officeDocument/2006/relationships" id="2147483648" r:id="Rb4226f05b1844144"/>
+    <p:sldMasterId xmlns:r="http://schemas.openxmlformats.org/officeDocument/2006/relationships" id="2147483648" r:id="R8531b220333e4359"/>
   </p:sldMasterIdLst>
   <p:notesMasterIdLst>
-    <p:notesMasterId xmlns:r="http://schemas.openxmlformats.org/officeDocument/2006/relationships" r:id="Rbc0e3c081a9b4021"/>
+    <p:notesMasterId xmlns:r="http://schemas.openxmlformats.org/officeDocument/2006/relationships" r:id="R39855110feb34306"/>
   </p:notesMasterIdLst>
   <p:sldIdLst>
-    <p:sldId xmlns:r="http://schemas.openxmlformats.org/officeDocument/2006/relationships" id="256" r:id="Rc4cc1f3e43424b7d"/>
-    <p:sldId xmlns:r="http://schemas.openxmlformats.org/officeDocument/2006/relationships" id="257" r:id="R57cd9dde1ef74a21"/>
-    <p:sldId xmlns:r="http://schemas.openxmlformats.org/officeDocument/2006/relationships" id="258" r:id="Rff908626f32d4f81"/>
-    <p:sldId xmlns:r="http://schemas.openxmlformats.org/officeDocument/2006/relationships" id="259" r:id="Rad03c37f1ad44d1b"/>
-    <p:sldId xmlns:r="http://schemas.openxmlformats.org/officeDocument/2006/relationships" id="260" r:id="R4523dbf40fa34217"/>
-    <p:sldId xmlns:r="http://schemas.openxmlformats.org/officeDocument/2006/relationships" id="261" r:id="R92281173ae6e4e3e"/>
-    <p:sldId xmlns:r="http://schemas.openxmlformats.org/officeDocument/2006/relationships" id="262" r:id="R6da863f6d9e54b36"/>
-    <p:sldId xmlns:r="http://schemas.openxmlformats.org/officeDocument/2006/relationships" id="263" r:id="Re1417ddda1324535"/>
-    <p:sldId xmlns:r="http://schemas.openxmlformats.org/officeDocument/2006/relationships" id="264" r:id="Rd03bab0f7d214ae7"/>
-    <p:sldId xmlns:r="http://schemas.openxmlformats.org/officeDocument/2006/relationships" id="265" r:id="R8ea84fc8309d4174"/>
-    <p:sldId xmlns:r="http://schemas.openxmlformats.org/officeDocument/2006/relationships" id="266" r:id="Rd2199cdb225049c9"/>
-    <p:sldId xmlns:r="http://schemas.openxmlformats.org/officeDocument/2006/relationships" id="267" r:id="Rcdbe58797e6949be"/>
-    <p:sldId xmlns:r="http://schemas.openxmlformats.org/officeDocument/2006/relationships" id="268" r:id="Rb93b57556d194391"/>
-    <p:sldId xmlns:r="http://schemas.openxmlformats.org/officeDocument/2006/relationships" id="269" r:id="R1e60bfc8b2b44a11"/>
+    <p:sldId xmlns:r="http://schemas.openxmlformats.org/officeDocument/2006/relationships" id="256" r:id="R37eaa77ba8f54367"/>
+    <p:sldId xmlns:r="http://schemas.openxmlformats.org/officeDocument/2006/relationships" id="257" r:id="Rc123358a841e4bd3"/>
+    <p:sldId xmlns:r="http://schemas.openxmlformats.org/officeDocument/2006/relationships" id="258" r:id="R6f2d073b12e44fb5"/>
+    <p:sldId xmlns:r="http://schemas.openxmlformats.org/officeDocument/2006/relationships" id="259" r:id="Rb74fad8066cb485f"/>
+    <p:sldId xmlns:r="http://schemas.openxmlformats.org/officeDocument/2006/relationships" id="260" r:id="Rb582645f96ca4f93"/>
+    <p:sldId xmlns:r="http://schemas.openxmlformats.org/officeDocument/2006/relationships" id="261" r:id="R4a9fcef939ca4d16"/>
+    <p:sldId xmlns:r="http://schemas.openxmlformats.org/officeDocument/2006/relationships" id="262" r:id="R23a2484615df48ab"/>
+    <p:sldId xmlns:r="http://schemas.openxmlformats.org/officeDocument/2006/relationships" id="263" r:id="R47a09ce93e1f481a"/>
+    <p:sldId xmlns:r="http://schemas.openxmlformats.org/officeDocument/2006/relationships" id="264" r:id="R83493b2d503d4bc2"/>
+    <p:sldId xmlns:r="http://schemas.openxmlformats.org/officeDocument/2006/relationships" id="265" r:id="R819223ba077e477f"/>
+    <p:sldId xmlns:r="http://schemas.openxmlformats.org/officeDocument/2006/relationships" id="266" r:id="R5331b1cfefdf4917"/>
+    <p:sldId xmlns:r="http://schemas.openxmlformats.org/officeDocument/2006/relationships" id="267" r:id="R5ecaf5351b0841b2"/>
+    <p:sldId xmlns:r="http://schemas.openxmlformats.org/officeDocument/2006/relationships" id="268" r:id="R054a3b8539c3463f"/>
+    <p:sldId xmlns:r="http://schemas.openxmlformats.org/officeDocument/2006/relationships" id="269" r:id="Re9f156e57b8e44d8"/>
   </p:sldIdLst>
   <p:sldSz cx="18288000" cy="10287000"/>
   <p:notesSz cx="6858000" cy="9144000"/>
@@ -475,7 +475,7 @@
           </a:p>
           <a:p xmlns:a="http://schemas.openxmlformats.org/drawingml/2006/main">
             <a:r>
-              <a:t>I'm Thomas Prislac. I'm developing Control Anchor, powered by Triadic Cognitive Systems. This is an invitation to computer-science departments, research software engineers, students and other collaborators to help build and test it.</a:t>
+              <a:t>I'm the project lead. I'm developing Control Anchor, powered by Triadic Cognitive Systems. This is an invitation to computer-science departments, research software engineers, students and other collaborators to help build and test it.</a:t>
             </a:r>
           </a:p>
           <a:p xmlns:a="http://schemas.openxmlformats.org/drawingml/2006/main">
@@ -1094,12 +1094,21 @@
             </a:r>
           </a:p>
           <a:p xmlns:a="http://schemas.openxmlformats.org/drawingml/2006/main">
-            <a:br/>
-            <a:br/>
+            <a:r>
+              <a:t/>
+            </a:r>
+          </a:p>
+          <a:p xmlns:a="http://schemas.openxmlformats.org/drawingml/2006/main">
+            <a:r>
+              <a:t/>
+            </a:r>
+          </a:p>
+          <a:p xmlns:a="http://schemas.openxmlformats.org/drawingml/2006/main">
             <a:r>
               <a:t>Original application status source: https://github.com/pdxvoiceteacher/triadicbrain-open-alpha/blob/37583fd91ff7f0d912256c10fea89ff6896763cf/README.md</a:t>
             </a:r>
-            <a:br/>
+          </a:p>
+          <a:p xmlns:a="http://schemas.openxmlformats.org/drawingml/2006/main">
             <a:r>
               <a:t>Installation run: https://github.com/pdxvoiceteacher/triadicbrain-open-alpha/actions/runs/39161062220</a:t>
             </a:r>
@@ -4134,12 +4143,12 @@
   </p:cSld>
   <p:clrMap bg1="lt1" tx1="dk1" bg2="lt2" tx2="dk2" accent1="accent1" accent2="accent2" accent3="accent3" accent4="accent4" accent5="accent5" accent6="accent6" hlink="hlink" folHlink="folHlink"/>
   <p:sldLayoutIdLst>
-    <p:sldLayoutId xmlns:r="http://schemas.openxmlformats.org/officeDocument/2006/relationships" id="2147483649" r:id="R740de523681f47e8"/>
-    <p:sldLayoutId xmlns:r="http://schemas.openxmlformats.org/officeDocument/2006/relationships" id="2147483650" r:id="R5619045a8a684112"/>
-    <p:sldLayoutId xmlns:r="http://schemas.openxmlformats.org/officeDocument/2006/relationships" id="2147483651" r:id="Rb7414888aefb431a"/>
-    <p:sldLayoutId xmlns:r="http://schemas.openxmlformats.org/officeDocument/2006/relationships" id="2147483652" r:id="Rf44bfa38909a4c15"/>
-    <p:sldLayoutId xmlns:r="http://schemas.openxmlformats.org/officeDocument/2006/relationships" id="2147483653" r:id="Rcc2ff49bc5894eab"/>
-    <p:sldLayoutId xmlns:r="http://schemas.openxmlformats.org/officeDocument/2006/relationships" id="2147483654" r:id="Rec06f5a754414c74"/>
+    <p:sldLayoutId xmlns:r="http://schemas.openxmlformats.org/officeDocument/2006/relationships" id="2147483649" r:id="R33d5d0397a454f60"/>
+    <p:sldLayoutId xmlns:r="http://schemas.openxmlformats.org/officeDocument/2006/relationships" id="2147483650" r:id="R70c6974223a44e7c"/>
+    <p:sldLayoutId xmlns:r="http://schemas.openxmlformats.org/officeDocument/2006/relationships" id="2147483651" r:id="R940626a4a9544416"/>
+    <p:sldLayoutId xmlns:r="http://schemas.openxmlformats.org/officeDocument/2006/relationships" id="2147483652" r:id="R682645e1a4364214"/>
+    <p:sldLayoutId xmlns:r="http://schemas.openxmlformats.org/officeDocument/2006/relationships" id="2147483653" r:id="Ra2b8fb3b8b7742c8"/>
+    <p:sldLayoutId xmlns:r="http://schemas.openxmlformats.org/officeDocument/2006/relationships" id="2147483654" r:id="R30284ac3a8184078"/>
   </p:sldLayoutIdLst>
   <p:txStyles>
     <p:titleStyle>
@@ -4887,7 +4896,7 @@
                 <a:ea typeface="Nimbus Sans"/>
                 <a:cs typeface="Nimbus Sans"/>
               </a:rPr>
-              <a:t>Thomas Prislac</a:t>
+              <a:t>Project Lead</a:t>
             </a:r>
           </a:p>
           <a:p xmlns:a="http://schemas.openxmlformats.org/drawingml/2006/main">
@@ -8619,7 +8628,7 @@
           <p:cNvPr id="14" name="">
             <a:extLst xmlns:a="http://schemas.openxmlformats.org/drawingml/2006/main">
               <a:ext uri="{FF2B5EF4-FFF2-40B4-BE49-F238E27FC236}">
-                <a16:creationId xmlns:a16="http://schemas.microsoft.com/office/drawing/2014/main" id="{9EA107A2-84D3-48A8-BDE4-61AFECEB33D2}"/>
+                <a16:creationId xmlns:a16="http://schemas.microsoft.com/office/drawing/2014/main" id="{63041B4E-099A-454C-8941-BE12067D9B18}"/>
               </a:ext>
             </a:extLst>
           </p:cNvPr>
@@ -8651,7 +8660,7 @@
           <p:cNvPr id="13" name="">
             <a:extLst xmlns:a="http://schemas.openxmlformats.org/drawingml/2006/main">
               <a:ext uri="{FF2B5EF4-FFF2-40B4-BE49-F238E27FC236}">
-                <a16:creationId xmlns:a16="http://schemas.microsoft.com/office/drawing/2014/main" id="{97BEB0E9-CC0D-4C44-AF91-BF62D27D804B}"/>
+                <a16:creationId xmlns:a16="http://schemas.microsoft.com/office/drawing/2014/main" id="{CFF49EA8-4FD0-4736-9CD7-9F6A1B565F0A}"/>
               </a:ext>
             </a:extLst>
           </p:cNvPr>
@@ -8683,7 +8692,7 @@
           <p:cNvPr id="12" name="">
             <a:extLst xmlns:a="http://schemas.openxmlformats.org/drawingml/2006/main">
               <a:ext uri="{FF2B5EF4-FFF2-40B4-BE49-F238E27FC236}">
-                <a16:creationId xmlns:a16="http://schemas.microsoft.com/office/drawing/2014/main" id="{6BE12030-CD36-47AF-9EBB-3FC809F8927D}"/>
+                <a16:creationId xmlns:a16="http://schemas.microsoft.com/office/drawing/2014/main" id="{E916B6C6-BD6D-4800-9181-50C1ADC21200}"/>
               </a:ext>
             </a:extLst>
           </p:cNvPr>
@@ -11800,7 +11809,7 @@
           <p:cNvPr id="14" name="">
             <a:extLst xmlns:a="http://schemas.openxmlformats.org/drawingml/2006/main">
               <a:ext uri="{FF2B5EF4-FFF2-40B4-BE49-F238E27FC236}">
-                <a16:creationId xmlns:a16="http://schemas.microsoft.com/office/drawing/2014/main" id="{4BF1CF2C-CBDF-4BED-918C-0A8B6F845EC7}"/>
+                <a16:creationId xmlns:a16="http://schemas.microsoft.com/office/drawing/2014/main" id="{918D6E7B-8143-4EDE-93ED-FB36AEF9DB1A}"/>
               </a:ext>
             </a:extLst>
           </p:cNvPr>
@@ -11837,7 +11846,7 @@
           <p:cNvPr id="13" name="">
             <a:extLst xmlns:a="http://schemas.openxmlformats.org/drawingml/2006/main">
               <a:ext uri="{FF2B5EF4-FFF2-40B4-BE49-F238E27FC236}">
-                <a16:creationId xmlns:a16="http://schemas.microsoft.com/office/drawing/2014/main" id="{8D954142-BAA9-4D2B-B783-1105A98B41CA}"/>
+                <a16:creationId xmlns:a16="http://schemas.microsoft.com/office/drawing/2014/main" id="{0A8D5EF2-5D33-462D-89E2-7BD7F363F619}"/>
               </a:ext>
             </a:extLst>
           </p:cNvPr>
@@ -11874,7 +11883,7 @@
           <p:cNvPr id="12" name="">
             <a:extLst xmlns:a="http://schemas.openxmlformats.org/drawingml/2006/main">
               <a:ext uri="{FF2B5EF4-FFF2-40B4-BE49-F238E27FC236}">
-                <a16:creationId xmlns:a16="http://schemas.microsoft.com/office/drawing/2014/main" id="{2404E58E-168F-467C-B917-786673B0BF3B}"/>
+                <a16:creationId xmlns:a16="http://schemas.microsoft.com/office/drawing/2014/main" id="{E262A034-5489-4E89-90A3-8859646F0B94}"/>
               </a:ext>
             </a:extLst>
           </p:cNvPr>
